--- a/slides/ch17-strategy-for-communicators.pptx
+++ b/slides/ch17-strategy-for-communicators.pptx
@@ -5891,7 +5891,7 @@
                 </a:solidFill>
                 <a:latin typeface="Calibri"/>
               </a:rPr>
-              <a:t>BADM 225 · Chapter 17</a:t>
+              <a:t>BADM 225 · Chapter 17  ·  © Derek D. Bussan</a:t>
             </a:r>
           </a:p>
         </p:txBody>
@@ -6019,7 +6019,7 @@
                 </a:solidFill>
                 <a:latin typeface="Calibri"/>
               </a:rPr>
-              <a:t>BADM 225 · Chapter 17</a:t>
+              <a:t>BADM 225 · Chapter 17  ·  © Derek D. Bussan</a:t>
             </a:r>
           </a:p>
         </p:txBody>
@@ -6306,7 +6306,7 @@
                 </a:solidFill>
                 <a:latin typeface="Calibri"/>
               </a:rPr>
-              <a:t>BADM 225 · Chapter 17</a:t>
+              <a:t>BADM 225 · Chapter 17  ·  © Derek D. Bussan</a:t>
             </a:r>
           </a:p>
         </p:txBody>
@@ -6593,7 +6593,7 @@
                 </a:solidFill>
                 <a:latin typeface="Calibri"/>
               </a:rPr>
-              <a:t>BADM 225 · Chapter 17</a:t>
+              <a:t>BADM 225 · Chapter 17  ·  © Derek D. Bussan</a:t>
             </a:r>
           </a:p>
         </p:txBody>
@@ -6958,7 +6958,7 @@
                 </a:solidFill>
                 <a:latin typeface="Calibri"/>
               </a:rPr>
-              <a:t>BADM 225 · Chapter 17</a:t>
+              <a:t>BADM 225 · Chapter 17  ·  © Derek D. Bussan</a:t>
             </a:r>
           </a:p>
         </p:txBody>
@@ -7086,7 +7086,7 @@
                 </a:solidFill>
                 <a:latin typeface="Calibri"/>
               </a:rPr>
-              <a:t>BADM 225 · Chapter 17</a:t>
+              <a:t>BADM 225 · Chapter 17  ·  © Derek D. Bussan</a:t>
             </a:r>
           </a:p>
         </p:txBody>
@@ -7373,7 +7373,7 @@
                 </a:solidFill>
                 <a:latin typeface="Calibri"/>
               </a:rPr>
-              <a:t>BADM 225 · Chapter 17</a:t>
+              <a:t>BADM 225 · Chapter 17  ·  © Derek D. Bussan</a:t>
             </a:r>
           </a:p>
         </p:txBody>
@@ -7660,7 +7660,7 @@
                 </a:solidFill>
                 <a:latin typeface="Calibri"/>
               </a:rPr>
-              <a:t>BADM 225 · Chapter 17</a:t>
+              <a:t>BADM 225 · Chapter 17  ·  © Derek D. Bussan</a:t>
             </a:r>
           </a:p>
         </p:txBody>
@@ -8025,7 +8025,7 @@
                 </a:solidFill>
                 <a:latin typeface="Calibri"/>
               </a:rPr>
-              <a:t>BADM 225 · Chapter 17</a:t>
+              <a:t>BADM 225 · Chapter 17  ·  © Derek D. Bussan</a:t>
             </a:r>
           </a:p>
         </p:txBody>
@@ -8153,7 +8153,7 @@
                 </a:solidFill>
                 <a:latin typeface="Calibri"/>
               </a:rPr>
-              <a:t>BADM 225 · Chapter 17</a:t>
+              <a:t>BADM 225 · Chapter 17  ·  © Derek D. Bussan</a:t>
             </a:r>
           </a:p>
         </p:txBody>
@@ -8440,7 +8440,7 @@
                 </a:solidFill>
                 <a:latin typeface="Calibri"/>
               </a:rPr>
-              <a:t>BADM 225 · Chapter 17</a:t>
+              <a:t>BADM 225 · Chapter 17  ·  © Derek D. Bussan</a:t>
             </a:r>
           </a:p>
         </p:txBody>
@@ -8761,7 +8761,7 @@
                 </a:solidFill>
                 <a:latin typeface="Calibri"/>
               </a:rPr>
-              <a:t>BADM 225 · Chapter 17</a:t>
+              <a:t>BADM 225 · Chapter 17  ·  © Derek D. Bussan</a:t>
             </a:r>
           </a:p>
         </p:txBody>
@@ -9048,7 +9048,7 @@
                 </a:solidFill>
                 <a:latin typeface="Calibri"/>
               </a:rPr>
-              <a:t>BADM 225 · Chapter 17</a:t>
+              <a:t>BADM 225 · Chapter 17  ·  © Derek D. Bussan</a:t>
             </a:r>
           </a:p>
         </p:txBody>
@@ -9335,7 +9335,7 @@
                 </a:solidFill>
                 <a:latin typeface="Calibri"/>
               </a:rPr>
-              <a:t>BADM 225 · Chapter 17</a:t>
+              <a:t>BADM 225 · Chapter 17  ·  © Derek D. Bussan</a:t>
             </a:r>
           </a:p>
         </p:txBody>
@@ -9700,7 +9700,7 @@
                 </a:solidFill>
                 <a:latin typeface="Calibri"/>
               </a:rPr>
-              <a:t>BADM 225 · Chapter 17</a:t>
+              <a:t>BADM 225 · Chapter 17  ·  © Derek D. Bussan</a:t>
             </a:r>
           </a:p>
         </p:txBody>
@@ -9828,7 +9828,7 @@
                 </a:solidFill>
                 <a:latin typeface="Calibri"/>
               </a:rPr>
-              <a:t>BADM 225 · Chapter 17</a:t>
+              <a:t>BADM 225 · Chapter 17  ·  © Derek D. Bussan</a:t>
             </a:r>
           </a:p>
         </p:txBody>
@@ -10115,7 +10115,7 @@
                 </a:solidFill>
                 <a:latin typeface="Calibri"/>
               </a:rPr>
-              <a:t>BADM 225 · Chapter 17</a:t>
+              <a:t>BADM 225 · Chapter 17  ·  © Derek D. Bussan</a:t>
             </a:r>
           </a:p>
         </p:txBody>
@@ -10402,7 +10402,7 @@
                 </a:solidFill>
                 <a:latin typeface="Calibri"/>
               </a:rPr>
-              <a:t>BADM 225 · Chapter 17</a:t>
+              <a:t>BADM 225 · Chapter 17  ·  © Derek D. Bussan</a:t>
             </a:r>
           </a:p>
         </p:txBody>
@@ -10689,7 +10689,7 @@
                 </a:solidFill>
                 <a:latin typeface="Calibri"/>
               </a:rPr>
-              <a:t>BADM 225 · Chapter 17</a:t>
+              <a:t>BADM 225 · Chapter 17  ·  © Derek D. Bussan</a:t>
             </a:r>
           </a:p>
         </p:txBody>
@@ -11504,7 +11504,7 @@
                 </a:solidFill>
                 <a:latin typeface="Calibri"/>
               </a:rPr>
-              <a:t>BADM 225 · Chapter 17</a:t>
+              <a:t>BADM 225 · Chapter 17  ·  © Derek D. Bussan</a:t>
             </a:r>
           </a:p>
         </p:txBody>
@@ -11780,7 +11780,7 @@
                 </a:solidFill>
                 <a:latin typeface="Calibri"/>
               </a:rPr>
-              <a:t>BADM 225 · Chapter 17</a:t>
+              <a:t>BADM 225 · Chapter 17  ·  © Derek D. Bussan</a:t>
             </a:r>
           </a:p>
         </p:txBody>
@@ -11873,7 +11873,7 @@
                 </a:solidFill>
                 <a:latin typeface="Calibri"/>
               </a:rPr>
-              <a:t>BADM 225 · Chapter 17</a:t>
+              <a:t>BADM 225 · Chapter 17  ·  © Derek D. Bussan</a:t>
             </a:r>
           </a:p>
         </p:txBody>
@@ -12199,7 +12199,7 @@
                 </a:solidFill>
                 <a:latin typeface="Calibri"/>
               </a:rPr>
-              <a:t>BADM 225 · Chapter 17</a:t>
+              <a:t>BADM 225 · Chapter 17  ·  © Derek D. Bussan</a:t>
             </a:r>
           </a:p>
         </p:txBody>
@@ -12598,7 +12598,7 @@
                 </a:solidFill>
                 <a:latin typeface="Calibri"/>
               </a:rPr>
-              <a:t>BADM 225 · Chapter 17</a:t>
+              <a:t>BADM 225 · Chapter 17  ·  © Derek D. Bussan</a:t>
             </a:r>
           </a:p>
         </p:txBody>
@@ -12726,7 +12726,7 @@
                 </a:solidFill>
                 <a:latin typeface="Calibri"/>
               </a:rPr>
-              <a:t>BADM 225 · Chapter 17</a:t>
+              <a:t>BADM 225 · Chapter 17  ·  © Derek D. Bussan</a:t>
             </a:r>
           </a:p>
         </p:txBody>
@@ -13288,7 +13288,7 @@
                 </a:solidFill>
                 <a:latin typeface="Calibri"/>
               </a:rPr>
-              <a:t>BADM 225 · Chapter 17</a:t>
+              <a:t>BADM 225 · Chapter 17  ·  © Derek D. Bussan</a:t>
             </a:r>
           </a:p>
         </p:txBody>
@@ -13575,7 +13575,7 @@
                 </a:solidFill>
                 <a:latin typeface="Calibri"/>
               </a:rPr>
-              <a:t>BADM 225 · Chapter 17</a:t>
+              <a:t>BADM 225 · Chapter 17  ·  © Derek D. Bussan</a:t>
             </a:r>
           </a:p>
         </p:txBody>
@@ -13862,7 +13862,7 @@
                 </a:solidFill>
                 <a:latin typeface="Calibri"/>
               </a:rPr>
-              <a:t>BADM 225 · Chapter 17</a:t>
+              <a:t>BADM 225 · Chapter 17  ·  © Derek D. Bussan</a:t>
             </a:r>
           </a:p>
         </p:txBody>
@@ -14149,7 +14149,7 @@
                 </a:solidFill>
                 <a:latin typeface="Calibri"/>
               </a:rPr>
-              <a:t>BADM 225 · Chapter 17</a:t>
+              <a:t>BADM 225 · Chapter 17  ·  © Derek D. Bussan</a:t>
             </a:r>
           </a:p>
         </p:txBody>

--- a/slides/ch17-strategy-for-communicators.pptx
+++ b/slides/ch17-strategy-for-communicators.pptx
@@ -5720,7 +5720,7 @@
                 </a:solidFill>
                 <a:latin typeface="Calibri"/>
               </a:rPr>
-              <a:t>BADM 225 · Chapter 17  ·  Original instructional material — no publisher content</a:t>
+              <a:t>BADM 225 · Chapter 17  ·  Original material © 2026 Derek D. Bussan, PhD, MBA  ·  No publisher content</a:t>
             </a:r>
           </a:p>
         </p:txBody>
